--- a/Hackathon.pptx
+++ b/Hackathon.pptx
@@ -1588,7 +1588,7 @@
           </a:prstGeom>
           <a:extLst>
             <a:ext uri="{C572A759-6A51-4108-AA02-DFA0A04FC94B}">
-              <ma14:wrappingTextBoxFlag xmlns="" xmlns:ma14="http://schemas.microsoft.com/office/mac/drawingml/2011/main" val="0"/>
+              <ma14:wrappingTextBoxFlag xmlns:ma14="http://schemas.microsoft.com/office/mac/drawingml/2011/main" xmlns="" val="0"/>
             </a:ext>
           </a:extLst>
         </p:spPr>
@@ -1669,7 +1669,7 @@
           </a:prstGeom>
           <a:extLst>
             <a:ext uri="{C572A759-6A51-4108-AA02-DFA0A04FC94B}">
-              <ma14:wrappingTextBoxFlag xmlns="" xmlns:ma14="http://schemas.microsoft.com/office/mac/drawingml/2011/main" val="0"/>
+              <ma14:wrappingTextBoxFlag xmlns:ma14="http://schemas.microsoft.com/office/mac/drawingml/2011/main" xmlns="" val="0"/>
             </a:ext>
           </a:extLst>
         </p:spPr>
@@ -1747,7 +1747,7 @@
           </a:prstGeom>
           <a:extLst>
             <a:ext uri="{C572A759-6A51-4108-AA02-DFA0A04FC94B}">
-              <ma14:wrappingTextBoxFlag xmlns="" xmlns:ma14="http://schemas.microsoft.com/office/mac/drawingml/2011/main" val="0"/>
+              <ma14:wrappingTextBoxFlag xmlns:ma14="http://schemas.microsoft.com/office/mac/drawingml/2011/main" xmlns="" val="0"/>
             </a:ext>
           </a:extLst>
         </p:spPr>
@@ -2056,6 +2056,66 @@
       </p:grpSpPr>
       <p:sp>
         <p:nvSpPr>
+          <p:cNvPr id="56" name="Rounded Rectangle 55">
+            <a:extLst>
+              <a:ext uri="{FF2B5EF4-FFF2-40B4-BE49-F238E27FC236}">
+                <a16:creationId xmlns:a16="http://schemas.microsoft.com/office/drawing/2014/main" id="{F78452CE-7DD8-70C5-B564-D667DEE6F4E9}"/>
+              </a:ext>
+            </a:extLst>
+          </p:cNvPr>
+          <p:cNvSpPr/>
+          <p:nvPr/>
+        </p:nvSpPr>
+        <p:spPr>
+          <a:xfrm>
+            <a:off x="1165860" y="5188562"/>
+            <a:ext cx="5070348" cy="709318"/>
+          </a:xfrm>
+          <a:prstGeom prst="roundRect">
+            <a:avLst/>
+          </a:prstGeom>
+          <a:solidFill>
+            <a:schemeClr val="accent5">
+              <a:lumMod val="40000"/>
+              <a:lumOff val="60000"/>
+            </a:schemeClr>
+          </a:solidFill>
+          <a:ln>
+            <a:solidFill>
+              <a:schemeClr val="accent1">
+                <a:lumMod val="40000"/>
+                <a:lumOff val="60000"/>
+              </a:schemeClr>
+            </a:solidFill>
+          </a:ln>
+        </p:spPr>
+        <p:style>
+          <a:lnRef idx="2">
+            <a:schemeClr val="accent1">
+              <a:shade val="15000"/>
+            </a:schemeClr>
+          </a:lnRef>
+          <a:fillRef idx="1">
+            <a:schemeClr val="accent1"/>
+          </a:fillRef>
+          <a:effectRef idx="0">
+            <a:schemeClr val="accent1"/>
+          </a:effectRef>
+          <a:fontRef idx="minor">
+            <a:schemeClr val="lt1"/>
+          </a:fontRef>
+        </p:style>
+        <p:txBody>
+          <a:bodyPr rtlCol="0" anchor="ctr"/>
+          <a:lstStyle/>
+          <a:p>
+            <a:pPr algn="ctr"/>
+            <a:endParaRPr lang="en-DE"/>
+          </a:p>
+        </p:txBody>
+      </p:sp>
+      <p:sp>
+        <p:nvSpPr>
           <p:cNvPr id="3" name="Text 1"/>
           <p:cNvSpPr txBox="1"/>
           <p:nvPr/>
@@ -2442,7 +2502,7 @@
         </p:nvSpPr>
         <p:spPr>
           <a:xfrm>
-            <a:off x="457200" y="5349240"/>
+            <a:off x="457200" y="5468986"/>
             <a:ext cx="1417320" cy="329184"/>
           </a:xfrm>
           <a:prstGeom prst="roundRect">
@@ -2476,7 +2536,7 @@
         </p:nvSpPr>
         <p:spPr>
           <a:xfrm>
-            <a:off x="457200" y="5349240"/>
+            <a:off x="457200" y="5468986"/>
             <a:ext cx="1417320" cy="329184"/>
           </a:xfrm>
           <a:prstGeom prst="rect">
@@ -2512,7 +2572,7 @@
         </p:nvSpPr>
         <p:spPr>
           <a:xfrm>
-            <a:off x="1984248" y="5349240"/>
+            <a:off x="1984248" y="5468986"/>
             <a:ext cx="1097280" cy="329184"/>
           </a:xfrm>
           <a:prstGeom prst="roundRect">
@@ -2546,7 +2606,7 @@
         </p:nvSpPr>
         <p:spPr>
           <a:xfrm>
-            <a:off x="1984248" y="5349240"/>
+            <a:off x="1984248" y="5468986"/>
             <a:ext cx="1097280" cy="329184"/>
           </a:xfrm>
           <a:prstGeom prst="rect">
@@ -2582,7 +2642,7 @@
         </p:nvSpPr>
         <p:spPr>
           <a:xfrm>
-            <a:off x="3191256" y="5349240"/>
+            <a:off x="3191256" y="5468986"/>
             <a:ext cx="868680" cy="329184"/>
           </a:xfrm>
           <a:prstGeom prst="roundRect">
@@ -2616,7 +2676,7 @@
         </p:nvSpPr>
         <p:spPr>
           <a:xfrm>
-            <a:off x="3225747" y="5346032"/>
+            <a:off x="3225747" y="5465778"/>
             <a:ext cx="868680" cy="329184"/>
           </a:xfrm>
           <a:prstGeom prst="rect">
@@ -2652,7 +2712,7 @@
         </p:nvSpPr>
         <p:spPr>
           <a:xfrm>
-            <a:off x="4169664" y="5349240"/>
+            <a:off x="4169664" y="5468986"/>
             <a:ext cx="1371600" cy="329184"/>
           </a:xfrm>
           <a:prstGeom prst="roundRect">
@@ -2686,7 +2746,7 @@
         </p:nvSpPr>
         <p:spPr>
           <a:xfrm>
-            <a:off x="4169664" y="5349240"/>
+            <a:off x="4169664" y="5468986"/>
             <a:ext cx="1371600" cy="329184"/>
           </a:xfrm>
           <a:prstGeom prst="rect">
@@ -2733,7 +2793,7 @@
         </p:nvSpPr>
         <p:spPr>
           <a:xfrm>
-            <a:off x="5650992" y="5349240"/>
+            <a:off x="5650992" y="5468986"/>
             <a:ext cx="1051560" cy="329184"/>
           </a:xfrm>
           <a:prstGeom prst="roundRect">
@@ -2767,7 +2827,7 @@
         </p:nvSpPr>
         <p:spPr>
           <a:xfrm>
-            <a:off x="5650992" y="5349240"/>
+            <a:off x="5650992" y="5468986"/>
             <a:ext cx="1051560" cy="329184"/>
           </a:xfrm>
           <a:prstGeom prst="rect">
@@ -3787,7 +3847,7 @@
         </p:nvSpPr>
         <p:spPr>
           <a:xfrm>
-            <a:off x="457200" y="5943600"/>
+            <a:off x="457200" y="6138912"/>
             <a:ext cx="6400800" cy="320040"/>
           </a:xfrm>
           <a:prstGeom prst="rect">
@@ -3849,7 +3909,7 @@
           </a:prstGeom>
           <a:extLst>
             <a:ext uri="{C572A759-6A51-4108-AA02-DFA0A04FC94B}">
-              <ma14:wrappingTextBoxFlag xmlns="" xmlns:ma14="http://schemas.microsoft.com/office/mac/drawingml/2011/main" val="0"/>
+              <ma14:wrappingTextBoxFlag xmlns:ma14="http://schemas.microsoft.com/office/mac/drawingml/2011/main" xmlns="" val="0"/>
             </a:ext>
           </a:extLst>
         </p:spPr>
@@ -3874,6 +3934,48 @@
               <a:t>1</a:t>
             </a:fld>
             <a:endParaRPr lang="en-US"/>
+          </a:p>
+        </p:txBody>
+      </p:sp>
+      <p:sp>
+        <p:nvSpPr>
+          <p:cNvPr id="55" name="Text 11">
+            <a:extLst>
+              <a:ext uri="{FF2B5EF4-FFF2-40B4-BE49-F238E27FC236}">
+                <a16:creationId xmlns:a16="http://schemas.microsoft.com/office/drawing/2014/main" id="{42E8AD5B-416C-A93F-5989-19C69960890F}"/>
+              </a:ext>
+            </a:extLst>
+          </p:cNvPr>
+          <p:cNvSpPr txBox="1"/>
+          <p:nvPr/>
+        </p:nvSpPr>
+        <p:spPr>
+          <a:xfrm>
+            <a:off x="2930652" y="5129197"/>
+            <a:ext cx="1417320" cy="329184"/>
+          </a:xfrm>
+          <a:prstGeom prst="rect">
+            <a:avLst/>
+          </a:prstGeom>
+          <a:noFill/>
+          <a:ln/>
+        </p:spPr>
+        <p:txBody>
+          <a:bodyPr wrap="square" lIns="0" tIns="0" rIns="0" bIns="0" rtlCol="0" anchor="ctr"/>
+          <a:lstStyle/>
+          <a:p>
+            <a:pPr marL="0" indent="0" algn="ctr">
+              <a:buNone/>
+            </a:pPr>
+            <a:r>
+              <a:rPr lang="en-US" sz="1600" b="1" dirty="0">
+                <a:latin typeface="Calibri" pitchFamily="34" charset="0"/>
+                <a:ea typeface="Calibri" pitchFamily="34" charset="-122"/>
+                <a:cs typeface="Calibri" pitchFamily="34" charset="-120"/>
+              </a:rPr>
+              <a:t>Docker</a:t>
+            </a:r>
+            <a:endParaRPr lang="en-US" sz="1600" b="1" dirty="0"/>
           </a:p>
         </p:txBody>
       </p:sp>
@@ -5840,7 +5942,7 @@
           </a:prstGeom>
           <a:extLst>
             <a:ext uri="{C572A759-6A51-4108-AA02-DFA0A04FC94B}">
-              <ma14:wrappingTextBoxFlag xmlns="" xmlns:ma14="http://schemas.microsoft.com/office/mac/drawingml/2011/main" val="0"/>
+              <ma14:wrappingTextBoxFlag xmlns:ma14="http://schemas.microsoft.com/office/mac/drawingml/2011/main" xmlns="" val="0"/>
             </a:ext>
           </a:extLst>
         </p:spPr>
@@ -7573,7 +7675,7 @@
           </a:prstGeom>
           <a:extLst>
             <a:ext uri="{C572A759-6A51-4108-AA02-DFA0A04FC94B}">
-              <ma14:wrappingTextBoxFlag xmlns="" xmlns:ma14="http://schemas.microsoft.com/office/mac/drawingml/2011/main" val="0"/>
+              <ma14:wrappingTextBoxFlag xmlns:ma14="http://schemas.microsoft.com/office/mac/drawingml/2011/main" xmlns="" val="0"/>
             </a:ext>
           </a:extLst>
         </p:spPr>
@@ -9002,7 +9104,7 @@
           </a:prstGeom>
           <a:extLst>
             <a:ext uri="{C572A759-6A51-4108-AA02-DFA0A04FC94B}">
-              <ma14:wrappingTextBoxFlag xmlns="" xmlns:ma14="http://schemas.microsoft.com/office/mac/drawingml/2011/main" val="0"/>
+              <ma14:wrappingTextBoxFlag xmlns:ma14="http://schemas.microsoft.com/office/mac/drawingml/2011/main" xmlns="" val="0"/>
             </a:ext>
           </a:extLst>
         </p:spPr>
@@ -10024,7 +10126,7 @@
           </a:prstGeom>
           <a:extLst>
             <a:ext uri="{C572A759-6A51-4108-AA02-DFA0A04FC94B}">
-              <ma14:wrappingTextBoxFlag xmlns="" xmlns:ma14="http://schemas.microsoft.com/office/mac/drawingml/2011/main" val="0"/>
+              <ma14:wrappingTextBoxFlag xmlns:ma14="http://schemas.microsoft.com/office/mac/drawingml/2011/main" xmlns="" val="0"/>
             </a:ext>
           </a:extLst>
         </p:spPr>
@@ -11154,7 +11256,7 @@
           </a:prstGeom>
           <a:extLst>
             <a:ext uri="{C572A759-6A51-4108-AA02-DFA0A04FC94B}">
-              <ma14:wrappingTextBoxFlag xmlns="" xmlns:ma14="http://schemas.microsoft.com/office/mac/drawingml/2011/main" val="0"/>
+              <ma14:wrappingTextBoxFlag xmlns:ma14="http://schemas.microsoft.com/office/mac/drawingml/2011/main" xmlns="" val="0"/>
             </a:ext>
           </a:extLst>
         </p:spPr>
@@ -12425,7 +12527,7 @@
           </a:prstGeom>
           <a:extLst>
             <a:ext uri="{C572A759-6A51-4108-AA02-DFA0A04FC94B}">
-              <ma14:wrappingTextBoxFlag xmlns="" xmlns:ma14="http://schemas.microsoft.com/office/mac/drawingml/2011/main" val="0"/>
+              <ma14:wrappingTextBoxFlag xmlns:ma14="http://schemas.microsoft.com/office/mac/drawingml/2011/main" xmlns="" val="0"/>
             </a:ext>
           </a:extLst>
         </p:spPr>
@@ -13600,7 +13702,7 @@
           </a:prstGeom>
           <a:extLst>
             <a:ext uri="{C572A759-6A51-4108-AA02-DFA0A04FC94B}">
-              <ma14:wrappingTextBoxFlag xmlns="" xmlns:ma14="http://schemas.microsoft.com/office/mac/drawingml/2011/main" val="0"/>
+              <ma14:wrappingTextBoxFlag xmlns:ma14="http://schemas.microsoft.com/office/mac/drawingml/2011/main" xmlns="" val="0"/>
             </a:ext>
           </a:extLst>
         </p:spPr>
